--- a/Entrega/Presentacion.pptx
+++ b/Entrega/Presentacion.pptx
@@ -6,17 +6,16 @@
   </p:sldMasterIdLst>
   <p:sldIdLst>
     <p:sldId id="256" r:id="rId2"/>
-    <p:sldId id="257" r:id="rId3"/>
-    <p:sldId id="258" r:id="rId4"/>
-    <p:sldId id="259" r:id="rId5"/>
-    <p:sldId id="260" r:id="rId6"/>
-    <p:sldId id="261" r:id="rId7"/>
-    <p:sldId id="262" r:id="rId8"/>
-    <p:sldId id="263" r:id="rId9"/>
-    <p:sldId id="264" r:id="rId10"/>
-    <p:sldId id="265" r:id="rId11"/>
-    <p:sldId id="266" r:id="rId12"/>
-    <p:sldId id="267" r:id="rId13"/>
+    <p:sldId id="258" r:id="rId3"/>
+    <p:sldId id="259" r:id="rId4"/>
+    <p:sldId id="260" r:id="rId5"/>
+    <p:sldId id="261" r:id="rId6"/>
+    <p:sldId id="262" r:id="rId7"/>
+    <p:sldId id="263" r:id="rId8"/>
+    <p:sldId id="264" r:id="rId9"/>
+    <p:sldId id="265" r:id="rId10"/>
+    <p:sldId id="266" r:id="rId11"/>
+    <p:sldId id="267" r:id="rId12"/>
   </p:sldIdLst>
   <p:sldSz cx="12192000" cy="6858000"/>
   <p:notesSz cx="6858000" cy="9144000"/>
@@ -121,7 +120,6 @@
         <p14:section name="Sección predeterminada" id="{F023FF89-FF68-44A6-9FB7-D6CCD519B3F1}">
           <p14:sldIdLst>
             <p14:sldId id="256"/>
-            <p14:sldId id="257"/>
             <p14:sldId id="258"/>
             <p14:sldId id="259"/>
             <p14:sldId id="260"/>
@@ -135,6 +133,9 @@
           </p14:sldIdLst>
         </p14:section>
       </p14:sectionLst>
+    </p:ext>
+    <p:ext uri="{EFAFB233-063F-42B5-8137-9DF3F51BA10A}">
+      <p15:sldGuideLst xmlns:p15="http://schemas.microsoft.com/office/powerpoint/2012/main"/>
     </p:ext>
   </p:extLst>
 </p:presentation>
@@ -267,6 +268,13 @@
               </a:ext>
             </a:extLst>
           </p:spPr>
+          <p:txBody>
+            <a:bodyPr/>
+            <a:lstStyle/>
+            <a:p>
+              <a:endParaRPr lang="es-ES"/>
+            </a:p>
+          </p:txBody>
         </p:sp>
         <p:sp>
           <p:nvSpPr>
@@ -357,6 +365,13 @@
               </a:ext>
             </a:extLst>
           </p:spPr>
+          <p:txBody>
+            <a:bodyPr/>
+            <a:lstStyle/>
+            <a:p>
+              <a:endParaRPr lang="es-ES"/>
+            </a:p>
+          </p:txBody>
         </p:sp>
         <p:sp>
           <p:nvSpPr>
@@ -447,6 +462,13 @@
               </a:ext>
             </a:extLst>
           </p:spPr>
+          <p:txBody>
+            <a:bodyPr/>
+            <a:lstStyle/>
+            <a:p>
+              <a:endParaRPr lang="es-ES"/>
+            </a:p>
+          </p:txBody>
         </p:sp>
         <p:sp>
           <p:nvSpPr>
@@ -481,6 +503,13 @@
               </a:ext>
             </a:extLst>
           </p:spPr>
+          <p:txBody>
+            <a:bodyPr/>
+            <a:lstStyle/>
+            <a:p>
+              <a:endParaRPr lang="es-ES"/>
+            </a:p>
+          </p:txBody>
         </p:sp>
         <p:sp>
           <p:nvSpPr>
@@ -571,6 +600,13 @@
               </a:ext>
             </a:extLst>
           </p:spPr>
+          <p:txBody>
+            <a:bodyPr/>
+            <a:lstStyle/>
+            <a:p>
+              <a:endParaRPr lang="es-ES"/>
+            </a:p>
+          </p:txBody>
         </p:sp>
         <p:sp>
           <p:nvSpPr>
@@ -633,6 +669,13 @@
               </a:ext>
             </a:extLst>
           </p:spPr>
+          <p:txBody>
+            <a:bodyPr/>
+            <a:lstStyle/>
+            <a:p>
+              <a:endParaRPr lang="es-ES"/>
+            </a:p>
+          </p:txBody>
         </p:sp>
         <p:sp>
           <p:nvSpPr>
@@ -695,6 +738,13 @@
               </a:ext>
             </a:extLst>
           </p:spPr>
+          <p:txBody>
+            <a:bodyPr/>
+            <a:lstStyle/>
+            <a:p>
+              <a:endParaRPr lang="es-ES"/>
+            </a:p>
+          </p:txBody>
         </p:sp>
         <p:sp>
           <p:nvSpPr>
@@ -785,6 +835,13 @@
               </a:ext>
             </a:extLst>
           </p:spPr>
+          <p:txBody>
+            <a:bodyPr/>
+            <a:lstStyle/>
+            <a:p>
+              <a:endParaRPr lang="es-ES"/>
+            </a:p>
+          </p:txBody>
         </p:sp>
         <p:sp>
           <p:nvSpPr>
@@ -847,6 +904,13 @@
               </a:ext>
             </a:extLst>
           </p:spPr>
+          <p:txBody>
+            <a:bodyPr/>
+            <a:lstStyle/>
+            <a:p>
+              <a:endParaRPr lang="es-ES"/>
+            </a:p>
+          </p:txBody>
         </p:sp>
         <p:sp>
           <p:nvSpPr>
@@ -909,6 +973,13 @@
               </a:ext>
             </a:extLst>
           </p:spPr>
+          <p:txBody>
+            <a:bodyPr/>
+            <a:lstStyle/>
+            <a:p>
+              <a:endParaRPr lang="es-ES"/>
+            </a:p>
+          </p:txBody>
         </p:sp>
         <p:sp>
           <p:nvSpPr>
@@ -999,6 +1070,13 @@
               </a:ext>
             </a:extLst>
           </p:spPr>
+          <p:txBody>
+            <a:bodyPr/>
+            <a:lstStyle/>
+            <a:p>
+              <a:endParaRPr lang="es-ES"/>
+            </a:p>
+          </p:txBody>
         </p:sp>
         <p:sp>
           <p:nvSpPr>
@@ -1089,6 +1167,13 @@
               </a:ext>
             </a:extLst>
           </p:spPr>
+          <p:txBody>
+            <a:bodyPr/>
+            <a:lstStyle/>
+            <a:p>
+              <a:endParaRPr lang="es-ES"/>
+            </a:p>
+          </p:txBody>
         </p:sp>
         <p:sp>
           <p:nvSpPr>
@@ -1151,6 +1236,13 @@
               </a:ext>
             </a:extLst>
           </p:spPr>
+          <p:txBody>
+            <a:bodyPr/>
+            <a:lstStyle/>
+            <a:p>
+              <a:endParaRPr lang="es-ES"/>
+            </a:p>
+          </p:txBody>
         </p:sp>
         <p:sp>
           <p:nvSpPr>
@@ -1261,6 +1353,13 @@
               </a:ext>
             </a:extLst>
           </p:spPr>
+          <p:txBody>
+            <a:bodyPr/>
+            <a:lstStyle/>
+            <a:p>
+              <a:endParaRPr lang="es-ES"/>
+            </a:p>
+          </p:txBody>
         </p:sp>
         <p:sp>
           <p:nvSpPr>
@@ -1323,6 +1422,13 @@
               </a:ext>
             </a:extLst>
           </p:spPr>
+          <p:txBody>
+            <a:bodyPr/>
+            <a:lstStyle/>
+            <a:p>
+              <a:endParaRPr lang="es-ES"/>
+            </a:p>
+          </p:txBody>
         </p:sp>
         <p:sp>
           <p:nvSpPr>
@@ -1413,6 +1519,13 @@
               </a:ext>
             </a:extLst>
           </p:spPr>
+          <p:txBody>
+            <a:bodyPr/>
+            <a:lstStyle/>
+            <a:p>
+              <a:endParaRPr lang="es-ES"/>
+            </a:p>
+          </p:txBody>
         </p:sp>
         <p:sp>
           <p:nvSpPr>
@@ -1503,6 +1616,13 @@
               </a:ext>
             </a:extLst>
           </p:spPr>
+          <p:txBody>
+            <a:bodyPr/>
+            <a:lstStyle/>
+            <a:p>
+              <a:endParaRPr lang="es-ES"/>
+            </a:p>
+          </p:txBody>
         </p:sp>
         <p:sp>
           <p:nvSpPr>
@@ -1565,6 +1685,13 @@
               </a:ext>
             </a:extLst>
           </p:spPr>
+          <p:txBody>
+            <a:bodyPr/>
+            <a:lstStyle/>
+            <a:p>
+              <a:endParaRPr lang="es-ES"/>
+            </a:p>
+          </p:txBody>
         </p:sp>
         <p:sp>
           <p:nvSpPr>
@@ -1655,6 +1782,13 @@
               </a:ext>
             </a:extLst>
           </p:spPr>
+          <p:txBody>
+            <a:bodyPr/>
+            <a:lstStyle/>
+            <a:p>
+              <a:endParaRPr lang="es-ES"/>
+            </a:p>
+          </p:txBody>
         </p:sp>
         <p:sp>
           <p:nvSpPr>
@@ -1745,6 +1879,13 @@
               </a:ext>
             </a:extLst>
           </p:spPr>
+          <p:txBody>
+            <a:bodyPr/>
+            <a:lstStyle/>
+            <a:p>
+              <a:endParaRPr lang="es-ES"/>
+            </a:p>
+          </p:txBody>
         </p:sp>
         <p:sp>
           <p:nvSpPr>
@@ -1801,6 +1942,13 @@
               </a:ext>
             </a:extLst>
           </p:spPr>
+          <p:txBody>
+            <a:bodyPr/>
+            <a:lstStyle/>
+            <a:p>
+              <a:endParaRPr lang="es-ES"/>
+            </a:p>
+          </p:txBody>
         </p:sp>
         <p:sp>
           <p:nvSpPr>
@@ -1891,6 +2039,13 @@
               </a:ext>
             </a:extLst>
           </p:spPr>
+          <p:txBody>
+            <a:bodyPr/>
+            <a:lstStyle/>
+            <a:p>
+              <a:endParaRPr lang="es-ES"/>
+            </a:p>
+          </p:txBody>
         </p:sp>
         <p:sp>
           <p:nvSpPr>
@@ -1947,6 +2102,13 @@
               </a:ext>
             </a:extLst>
           </p:spPr>
+          <p:txBody>
+            <a:bodyPr/>
+            <a:lstStyle/>
+            <a:p>
+              <a:endParaRPr lang="es-ES"/>
+            </a:p>
+          </p:txBody>
         </p:sp>
         <p:sp>
           <p:nvSpPr>
@@ -2037,6 +2199,13 @@
               </a:ext>
             </a:extLst>
           </p:spPr>
+          <p:txBody>
+            <a:bodyPr/>
+            <a:lstStyle/>
+            <a:p>
+              <a:endParaRPr lang="es-ES"/>
+            </a:p>
+          </p:txBody>
         </p:sp>
         <p:sp>
           <p:nvSpPr>
@@ -2105,6 +2274,13 @@
               </a:ext>
             </a:extLst>
           </p:spPr>
+          <p:txBody>
+            <a:bodyPr/>
+            <a:lstStyle/>
+            <a:p>
+              <a:endParaRPr lang="es-ES"/>
+            </a:p>
+          </p:txBody>
         </p:sp>
         <p:sp>
           <p:nvSpPr>
@@ -2195,6 +2371,13 @@
               </a:ext>
             </a:extLst>
           </p:spPr>
+          <p:txBody>
+            <a:bodyPr/>
+            <a:lstStyle/>
+            <a:p>
+              <a:endParaRPr lang="es-ES"/>
+            </a:p>
+          </p:txBody>
         </p:sp>
         <p:sp>
           <p:nvSpPr>
@@ -2263,6 +2446,13 @@
               </a:ext>
             </a:extLst>
           </p:spPr>
+          <p:txBody>
+            <a:bodyPr/>
+            <a:lstStyle/>
+            <a:p>
+              <a:endParaRPr lang="es-ES"/>
+            </a:p>
+          </p:txBody>
         </p:sp>
         <p:sp>
           <p:nvSpPr>
@@ -2353,6 +2543,13 @@
               </a:ext>
             </a:extLst>
           </p:spPr>
+          <p:txBody>
+            <a:bodyPr/>
+            <a:lstStyle/>
+            <a:p>
+              <a:endParaRPr lang="es-ES"/>
+            </a:p>
+          </p:txBody>
         </p:sp>
         <p:sp>
           <p:nvSpPr>
@@ -2387,6 +2584,13 @@
               </a:ext>
             </a:extLst>
           </p:spPr>
+          <p:txBody>
+            <a:bodyPr/>
+            <a:lstStyle/>
+            <a:p>
+              <a:endParaRPr lang="es-ES"/>
+            </a:p>
+          </p:txBody>
         </p:sp>
         <p:sp>
           <p:nvSpPr>
@@ -2477,6 +2681,13 @@
               </a:ext>
             </a:extLst>
           </p:spPr>
+          <p:txBody>
+            <a:bodyPr/>
+            <a:lstStyle/>
+            <a:p>
+              <a:endParaRPr lang="es-ES"/>
+            </a:p>
+          </p:txBody>
         </p:sp>
         <p:sp>
           <p:nvSpPr>
@@ -2539,6 +2750,13 @@
               </a:ext>
             </a:extLst>
           </p:spPr>
+          <p:txBody>
+            <a:bodyPr/>
+            <a:lstStyle/>
+            <a:p>
+              <a:endParaRPr lang="es-ES"/>
+            </a:p>
+          </p:txBody>
         </p:sp>
         <p:sp>
           <p:nvSpPr>
@@ -2601,6 +2819,13 @@
               </a:ext>
             </a:extLst>
           </p:spPr>
+          <p:txBody>
+            <a:bodyPr/>
+            <a:lstStyle/>
+            <a:p>
+              <a:endParaRPr lang="es-ES"/>
+            </a:p>
+          </p:txBody>
         </p:sp>
         <p:sp>
           <p:nvSpPr>
@@ -2691,6 +2916,13 @@
               </a:ext>
             </a:extLst>
           </p:spPr>
+          <p:txBody>
+            <a:bodyPr/>
+            <a:lstStyle/>
+            <a:p>
+              <a:endParaRPr lang="es-ES"/>
+            </a:p>
+          </p:txBody>
         </p:sp>
         <p:sp>
           <p:nvSpPr>
@@ -2759,6 +2991,13 @@
               </a:ext>
             </a:extLst>
           </p:spPr>
+          <p:txBody>
+            <a:bodyPr/>
+            <a:lstStyle/>
+            <a:p>
+              <a:endParaRPr lang="es-ES"/>
+            </a:p>
+          </p:txBody>
         </p:sp>
         <p:sp>
           <p:nvSpPr>
@@ -2821,6 +3060,13 @@
               </a:ext>
             </a:extLst>
           </p:spPr>
+          <p:txBody>
+            <a:bodyPr/>
+            <a:lstStyle/>
+            <a:p>
+              <a:endParaRPr lang="es-ES"/>
+            </a:p>
+          </p:txBody>
         </p:sp>
         <p:sp>
           <p:nvSpPr>
@@ -2911,6 +3157,13 @@
               </a:ext>
             </a:extLst>
           </p:spPr>
+          <p:txBody>
+            <a:bodyPr/>
+            <a:lstStyle/>
+            <a:p>
+              <a:endParaRPr lang="es-ES"/>
+            </a:p>
+          </p:txBody>
         </p:sp>
         <p:sp>
           <p:nvSpPr>
@@ -2973,6 +3226,13 @@
               </a:ext>
             </a:extLst>
           </p:spPr>
+          <p:txBody>
+            <a:bodyPr/>
+            <a:lstStyle/>
+            <a:p>
+              <a:endParaRPr lang="es-ES"/>
+            </a:p>
+          </p:txBody>
         </p:sp>
         <p:sp>
           <p:nvSpPr>
@@ -3063,6 +3323,13 @@
               </a:ext>
             </a:extLst>
           </p:spPr>
+          <p:txBody>
+            <a:bodyPr/>
+            <a:lstStyle/>
+            <a:p>
+              <a:endParaRPr lang="es-ES"/>
+            </a:p>
+          </p:txBody>
         </p:sp>
         <p:sp>
           <p:nvSpPr>
@@ -3125,6 +3392,13 @@
               </a:ext>
             </a:extLst>
           </p:spPr>
+          <p:txBody>
+            <a:bodyPr/>
+            <a:lstStyle/>
+            <a:p>
+              <a:endParaRPr lang="es-ES"/>
+            </a:p>
+          </p:txBody>
         </p:sp>
         <p:sp>
           <p:nvSpPr>
@@ -3215,6 +3489,13 @@
               </a:ext>
             </a:extLst>
           </p:spPr>
+          <p:txBody>
+            <a:bodyPr/>
+            <a:lstStyle/>
+            <a:p>
+              <a:endParaRPr lang="es-ES"/>
+            </a:p>
+          </p:txBody>
         </p:sp>
         <p:sp>
           <p:nvSpPr>
@@ -3249,6 +3530,13 @@
               </a:ext>
             </a:extLst>
           </p:spPr>
+          <p:txBody>
+            <a:bodyPr/>
+            <a:lstStyle/>
+            <a:p>
+              <a:endParaRPr lang="es-ES"/>
+            </a:p>
+          </p:txBody>
         </p:sp>
         <p:sp>
           <p:nvSpPr>
@@ -3314,6 +3602,13 @@
               </a:ext>
             </a:extLst>
           </p:spPr>
+          <p:txBody>
+            <a:bodyPr/>
+            <a:lstStyle/>
+            <a:p>
+              <a:endParaRPr lang="es-ES"/>
+            </a:p>
+          </p:txBody>
         </p:sp>
         <p:sp>
           <p:nvSpPr>
@@ -3404,6 +3699,13 @@
               </a:ext>
             </a:extLst>
           </p:spPr>
+          <p:txBody>
+            <a:bodyPr/>
+            <a:lstStyle/>
+            <a:p>
+              <a:endParaRPr lang="es-ES"/>
+            </a:p>
+          </p:txBody>
         </p:sp>
         <p:sp>
           <p:nvSpPr>
@@ -3466,6 +3768,13 @@
               </a:ext>
             </a:extLst>
           </p:spPr>
+          <p:txBody>
+            <a:bodyPr/>
+            <a:lstStyle/>
+            <a:p>
+              <a:endParaRPr lang="es-ES"/>
+            </a:p>
+          </p:txBody>
         </p:sp>
         <p:sp>
           <p:nvSpPr>
@@ -3556,6 +3865,13 @@
               </a:ext>
             </a:extLst>
           </p:spPr>
+          <p:txBody>
+            <a:bodyPr/>
+            <a:lstStyle/>
+            <a:p>
+              <a:endParaRPr lang="es-ES"/>
+            </a:p>
+          </p:txBody>
         </p:sp>
         <p:sp>
           <p:nvSpPr>
@@ -3646,6 +3962,13 @@
               </a:ext>
             </a:extLst>
           </p:spPr>
+          <p:txBody>
+            <a:bodyPr/>
+            <a:lstStyle/>
+            <a:p>
+              <a:endParaRPr lang="es-ES"/>
+            </a:p>
+          </p:txBody>
         </p:sp>
         <p:sp>
           <p:nvSpPr>
@@ -3711,6 +4034,13 @@
               </a:ext>
             </a:extLst>
           </p:spPr>
+          <p:txBody>
+            <a:bodyPr/>
+            <a:lstStyle/>
+            <a:p>
+              <a:endParaRPr lang="es-ES"/>
+            </a:p>
+          </p:txBody>
         </p:sp>
         <p:sp>
           <p:nvSpPr>
@@ -3773,6 +4103,13 @@
               </a:ext>
             </a:extLst>
           </p:spPr>
+          <p:txBody>
+            <a:bodyPr/>
+            <a:lstStyle/>
+            <a:p>
+              <a:endParaRPr lang="es-ES"/>
+            </a:p>
+          </p:txBody>
         </p:sp>
         <p:sp>
           <p:nvSpPr>
@@ -3863,6 +4200,13 @@
               </a:ext>
             </a:extLst>
           </p:spPr>
+          <p:txBody>
+            <a:bodyPr/>
+            <a:lstStyle/>
+            <a:p>
+              <a:endParaRPr lang="es-ES"/>
+            </a:p>
+          </p:txBody>
         </p:sp>
         <p:sp>
           <p:nvSpPr>
@@ -3953,6 +4297,13 @@
               </a:ext>
             </a:extLst>
           </p:spPr>
+          <p:txBody>
+            <a:bodyPr/>
+            <a:lstStyle/>
+            <a:p>
+              <a:endParaRPr lang="es-ES"/>
+            </a:p>
+          </p:txBody>
         </p:sp>
         <p:sp>
           <p:nvSpPr>
@@ -4015,6 +4366,13 @@
               </a:ext>
             </a:extLst>
           </p:spPr>
+          <p:txBody>
+            <a:bodyPr/>
+            <a:lstStyle/>
+            <a:p>
+              <a:endParaRPr lang="es-ES"/>
+            </a:p>
+          </p:txBody>
         </p:sp>
         <p:sp>
           <p:nvSpPr>
@@ -4135,6 +4493,13 @@
               </a:ext>
             </a:extLst>
           </p:spPr>
+          <p:txBody>
+            <a:bodyPr/>
+            <a:lstStyle/>
+            <a:p>
+              <a:endParaRPr lang="es-ES"/>
+            </a:p>
+          </p:txBody>
         </p:sp>
         <p:sp>
           <p:nvSpPr>
@@ -4203,6 +4568,13 @@
               </a:ext>
             </a:extLst>
           </p:spPr>
+          <p:txBody>
+            <a:bodyPr/>
+            <a:lstStyle/>
+            <a:p>
+              <a:endParaRPr lang="es-ES"/>
+            </a:p>
+          </p:txBody>
         </p:sp>
         <p:sp>
           <p:nvSpPr>
@@ -4293,6 +4665,13 @@
               </a:ext>
             </a:extLst>
           </p:spPr>
+          <p:txBody>
+            <a:bodyPr/>
+            <a:lstStyle/>
+            <a:p>
+              <a:endParaRPr lang="es-ES"/>
+            </a:p>
+          </p:txBody>
         </p:sp>
       </p:grpSp>
       <p:sp>
@@ -4422,7 +4801,7 @@
           <a:p>
             <a:fld id="{DCA36215-1DEB-4529-8A0C-05ACEF313B8E}" type="datetimeFigureOut">
               <a:rPr lang="es-ES" smtClean="0"/>
-              <a:t>12/05/2026</a:t>
+              <a:t>13/05/2026</a:t>
             </a:fld>
             <a:endParaRPr lang="es-ES"/>
           </a:p>
@@ -4689,7 +5068,7 @@
           <a:p>
             <a:fld id="{DCA36215-1DEB-4529-8A0C-05ACEF313B8E}" type="datetimeFigureOut">
               <a:rPr lang="es-ES" smtClean="0"/>
-              <a:t>12/05/2026</a:t>
+              <a:t>13/05/2026</a:t>
             </a:fld>
             <a:endParaRPr lang="es-ES"/>
           </a:p>
@@ -4885,7 +5264,7 @@
           <a:p>
             <a:fld id="{DCA36215-1DEB-4529-8A0C-05ACEF313B8E}" type="datetimeFigureOut">
               <a:rPr lang="es-ES" smtClean="0"/>
-              <a:t>12/05/2026</a:t>
+              <a:t>13/05/2026</a:t>
             </a:fld>
             <a:endParaRPr lang="es-ES"/>
           </a:p>
@@ -5148,7 +5527,7 @@
           <a:p>
             <a:fld id="{DCA36215-1DEB-4529-8A0C-05ACEF313B8E}" type="datetimeFigureOut">
               <a:rPr lang="es-ES" smtClean="0"/>
-              <a:t>12/05/2026</a:t>
+              <a:t>13/05/2026</a:t>
             </a:fld>
             <a:endParaRPr lang="es-ES"/>
           </a:p>
@@ -5582,7 +5961,7 @@
           <a:p>
             <a:fld id="{DCA36215-1DEB-4529-8A0C-05ACEF313B8E}" type="datetimeFigureOut">
               <a:rPr lang="es-ES" smtClean="0"/>
-              <a:t>12/05/2026</a:t>
+              <a:t>13/05/2026</a:t>
             </a:fld>
             <a:endParaRPr lang="es-ES"/>
           </a:p>
@@ -6128,7 +6507,7 @@
           <a:p>
             <a:fld id="{DCA36215-1DEB-4529-8A0C-05ACEF313B8E}" type="datetimeFigureOut">
               <a:rPr lang="es-ES" smtClean="0"/>
-              <a:t>12/05/2026</a:t>
+              <a:t>13/05/2026</a:t>
             </a:fld>
             <a:endParaRPr lang="es-ES"/>
           </a:p>
@@ -6848,7 +7227,7 @@
           <a:p>
             <a:fld id="{DCA36215-1DEB-4529-8A0C-05ACEF313B8E}" type="datetimeFigureOut">
               <a:rPr lang="es-ES" smtClean="0"/>
-              <a:t>12/05/2026</a:t>
+              <a:t>13/05/2026</a:t>
             </a:fld>
             <a:endParaRPr lang="es-ES"/>
           </a:p>
@@ -7018,7 +7397,7 @@
           <a:p>
             <a:fld id="{DCA36215-1DEB-4529-8A0C-05ACEF313B8E}" type="datetimeFigureOut">
               <a:rPr lang="es-ES" smtClean="0"/>
-              <a:t>12/05/2026</a:t>
+              <a:t>13/05/2026</a:t>
             </a:fld>
             <a:endParaRPr lang="es-ES"/>
           </a:p>
@@ -7198,7 +7577,7 @@
           <a:p>
             <a:fld id="{DCA36215-1DEB-4529-8A0C-05ACEF313B8E}" type="datetimeFigureOut">
               <a:rPr lang="es-ES" smtClean="0"/>
-              <a:t>12/05/2026</a:t>
+              <a:t>13/05/2026</a:t>
             </a:fld>
             <a:endParaRPr lang="es-ES"/>
           </a:p>
@@ -7368,7 +7747,7 @@
           <a:p>
             <a:fld id="{DCA36215-1DEB-4529-8A0C-05ACEF313B8E}" type="datetimeFigureOut">
               <a:rPr lang="es-ES" smtClean="0"/>
-              <a:t>12/05/2026</a:t>
+              <a:t>13/05/2026</a:t>
             </a:fld>
             <a:endParaRPr lang="es-ES"/>
           </a:p>
@@ -7618,7 +7997,7 @@
           <a:p>
             <a:fld id="{DCA36215-1DEB-4529-8A0C-05ACEF313B8E}" type="datetimeFigureOut">
               <a:rPr lang="es-ES" smtClean="0"/>
-              <a:t>12/05/2026</a:t>
+              <a:t>13/05/2026</a:t>
             </a:fld>
             <a:endParaRPr lang="es-ES"/>
           </a:p>
@@ -7850,7 +8229,7 @@
           <a:p>
             <a:fld id="{DCA36215-1DEB-4529-8A0C-05ACEF313B8E}" type="datetimeFigureOut">
               <a:rPr lang="es-ES" smtClean="0"/>
-              <a:t>12/05/2026</a:t>
+              <a:t>13/05/2026</a:t>
             </a:fld>
             <a:endParaRPr lang="es-ES"/>
           </a:p>
@@ -8231,7 +8610,7 @@
           <a:p>
             <a:fld id="{DCA36215-1DEB-4529-8A0C-05ACEF313B8E}" type="datetimeFigureOut">
               <a:rPr lang="es-ES" smtClean="0"/>
-              <a:t>12/05/2026</a:t>
+              <a:t>13/05/2026</a:t>
             </a:fld>
             <a:endParaRPr lang="es-ES"/>
           </a:p>
@@ -8349,7 +8728,7 @@
           <a:p>
             <a:fld id="{DCA36215-1DEB-4529-8A0C-05ACEF313B8E}" type="datetimeFigureOut">
               <a:rPr lang="es-ES" smtClean="0"/>
-              <a:t>12/05/2026</a:t>
+              <a:t>13/05/2026</a:t>
             </a:fld>
             <a:endParaRPr lang="es-ES"/>
           </a:p>
@@ -8444,7 +8823,7 @@
           <a:p>
             <a:fld id="{DCA36215-1DEB-4529-8A0C-05ACEF313B8E}" type="datetimeFigureOut">
               <a:rPr lang="es-ES" smtClean="0"/>
-              <a:t>12/05/2026</a:t>
+              <a:t>13/05/2026</a:t>
             </a:fld>
             <a:endParaRPr lang="es-ES"/>
           </a:p>
@@ -8693,7 +9072,7 @@
           <a:p>
             <a:fld id="{DCA36215-1DEB-4529-8A0C-05ACEF313B8E}" type="datetimeFigureOut">
               <a:rPr lang="es-ES" smtClean="0"/>
-              <a:t>12/05/2026</a:t>
+              <a:t>13/05/2026</a:t>
             </a:fld>
             <a:endParaRPr lang="es-ES"/>
           </a:p>
@@ -8973,7 +9352,7 @@
           <a:p>
             <a:fld id="{DCA36215-1DEB-4529-8A0C-05ACEF313B8E}" type="datetimeFigureOut">
               <a:rPr lang="es-ES" smtClean="0"/>
-              <a:t>12/05/2026</a:t>
+              <a:t>13/05/2026</a:t>
             </a:fld>
             <a:endParaRPr lang="es-ES"/>
           </a:p>
@@ -9181,6 +9560,13 @@
                 </a:ext>
               </a:extLst>
             </p:spPr>
+            <p:txBody>
+              <a:bodyPr/>
+              <a:lstStyle/>
+              <a:p>
+                <a:endParaRPr lang="es-ES"/>
+              </a:p>
+            </p:txBody>
           </p:sp>
           <p:sp>
             <p:nvSpPr>
@@ -9271,6 +9657,13 @@
                 </a:ext>
               </a:extLst>
             </p:spPr>
+            <p:txBody>
+              <a:bodyPr/>
+              <a:lstStyle/>
+              <a:p>
+                <a:endParaRPr lang="es-ES"/>
+              </a:p>
+            </p:txBody>
           </p:sp>
           <p:sp>
             <p:nvSpPr>
@@ -9361,6 +9754,13 @@
                 </a:ext>
               </a:extLst>
             </p:spPr>
+            <p:txBody>
+              <a:bodyPr/>
+              <a:lstStyle/>
+              <a:p>
+                <a:endParaRPr lang="es-ES"/>
+              </a:p>
+            </p:txBody>
           </p:sp>
           <p:sp>
             <p:nvSpPr>
@@ -9423,6 +9823,13 @@
                 </a:ext>
               </a:extLst>
             </p:spPr>
+            <p:txBody>
+              <a:bodyPr/>
+              <a:lstStyle/>
+              <a:p>
+                <a:endParaRPr lang="es-ES"/>
+              </a:p>
+            </p:txBody>
           </p:sp>
           <p:sp>
             <p:nvSpPr>
@@ -9513,6 +9920,13 @@
                 </a:ext>
               </a:extLst>
             </p:spPr>
+            <p:txBody>
+              <a:bodyPr/>
+              <a:lstStyle/>
+              <a:p>
+                <a:endParaRPr lang="es-ES"/>
+              </a:p>
+            </p:txBody>
           </p:sp>
           <p:sp>
             <p:nvSpPr>
@@ -9575,6 +9989,13 @@
                 </a:ext>
               </a:extLst>
             </p:spPr>
+            <p:txBody>
+              <a:bodyPr/>
+              <a:lstStyle/>
+              <a:p>
+                <a:endParaRPr lang="es-ES"/>
+              </a:p>
+            </p:txBody>
           </p:sp>
           <p:sp>
             <p:nvSpPr>
@@ -9637,6 +10058,13 @@
                 </a:ext>
               </a:extLst>
             </p:spPr>
+            <p:txBody>
+              <a:bodyPr/>
+              <a:lstStyle/>
+              <a:p>
+                <a:endParaRPr lang="es-ES"/>
+              </a:p>
+            </p:txBody>
           </p:sp>
           <p:sp>
             <p:nvSpPr>
@@ -9727,6 +10155,13 @@
                 </a:ext>
               </a:extLst>
             </p:spPr>
+            <p:txBody>
+              <a:bodyPr/>
+              <a:lstStyle/>
+              <a:p>
+                <a:endParaRPr lang="es-ES"/>
+              </a:p>
+            </p:txBody>
           </p:sp>
           <p:sp>
             <p:nvSpPr>
@@ -9817,6 +10252,13 @@
                 </a:ext>
               </a:extLst>
             </p:spPr>
+            <p:txBody>
+              <a:bodyPr/>
+              <a:lstStyle/>
+              <a:p>
+                <a:endParaRPr lang="es-ES"/>
+              </a:p>
+            </p:txBody>
           </p:sp>
           <p:sp>
             <p:nvSpPr>
@@ -9879,6 +10321,13 @@
                 </a:ext>
               </a:extLst>
             </p:spPr>
+            <p:txBody>
+              <a:bodyPr/>
+              <a:lstStyle/>
+              <a:p>
+                <a:endParaRPr lang="es-ES"/>
+              </a:p>
+            </p:txBody>
           </p:sp>
           <p:sp>
             <p:nvSpPr>
@@ -9989,6 +10438,13 @@
                 </a:ext>
               </a:extLst>
             </p:spPr>
+            <p:txBody>
+              <a:bodyPr/>
+              <a:lstStyle/>
+              <a:p>
+                <a:endParaRPr lang="es-ES"/>
+              </a:p>
+            </p:txBody>
           </p:sp>
           <p:sp>
             <p:nvSpPr>
@@ -10017,6 +10473,13 @@
                 <a:tailEnd/>
               </a:ln>
             </p:spPr>
+            <p:txBody>
+              <a:bodyPr/>
+              <a:lstStyle/>
+              <a:p>
+                <a:endParaRPr lang="es-ES"/>
+              </a:p>
+            </p:txBody>
           </p:sp>
           <p:sp>
             <p:nvSpPr>
@@ -10073,6 +10536,13 @@
                 </a:ext>
               </a:extLst>
             </p:spPr>
+            <p:txBody>
+              <a:bodyPr/>
+              <a:lstStyle/>
+              <a:p>
+                <a:endParaRPr lang="es-ES"/>
+              </a:p>
+            </p:txBody>
           </p:sp>
           <p:sp>
             <p:nvSpPr>
@@ -10135,6 +10605,13 @@
                 </a:ext>
               </a:extLst>
             </p:spPr>
+            <p:txBody>
+              <a:bodyPr/>
+              <a:lstStyle/>
+              <a:p>
+                <a:endParaRPr lang="es-ES"/>
+              </a:p>
+            </p:txBody>
           </p:sp>
           <p:sp>
             <p:nvSpPr>
@@ -10197,6 +10674,13 @@
                 </a:ext>
               </a:extLst>
             </p:spPr>
+            <p:txBody>
+              <a:bodyPr/>
+              <a:lstStyle/>
+              <a:p>
+                <a:endParaRPr lang="es-ES"/>
+              </a:p>
+            </p:txBody>
           </p:sp>
           <p:sp>
             <p:nvSpPr>
@@ -10287,6 +10771,13 @@
                 </a:ext>
               </a:extLst>
             </p:spPr>
+            <p:txBody>
+              <a:bodyPr/>
+              <a:lstStyle/>
+              <a:p>
+                <a:endParaRPr lang="es-ES"/>
+              </a:p>
+            </p:txBody>
           </p:sp>
           <p:sp>
             <p:nvSpPr>
@@ -10321,6 +10812,13 @@
                 </a:ext>
               </a:extLst>
             </p:spPr>
+            <p:txBody>
+              <a:bodyPr/>
+              <a:lstStyle/>
+              <a:p>
+                <a:endParaRPr lang="es-ES"/>
+              </a:p>
+            </p:txBody>
           </p:sp>
           <p:sp>
             <p:nvSpPr>
@@ -10386,6 +10884,13 @@
                 </a:ext>
               </a:extLst>
             </p:spPr>
+            <p:txBody>
+              <a:bodyPr/>
+              <a:lstStyle/>
+              <a:p>
+                <a:endParaRPr lang="es-ES"/>
+              </a:p>
+            </p:txBody>
           </p:sp>
           <p:sp>
             <p:nvSpPr>
@@ -10476,6 +10981,13 @@
                 </a:ext>
               </a:extLst>
             </p:spPr>
+            <p:txBody>
+              <a:bodyPr/>
+              <a:lstStyle/>
+              <a:p>
+                <a:endParaRPr lang="es-ES"/>
+              </a:p>
+            </p:txBody>
           </p:sp>
           <p:sp>
             <p:nvSpPr>
@@ -10538,6 +11050,13 @@
                 </a:ext>
               </a:extLst>
             </p:spPr>
+            <p:txBody>
+              <a:bodyPr/>
+              <a:lstStyle/>
+              <a:p>
+                <a:endParaRPr lang="es-ES"/>
+              </a:p>
+            </p:txBody>
           </p:sp>
           <p:sp>
             <p:nvSpPr>
@@ -10628,6 +11147,13 @@
                 </a:ext>
               </a:extLst>
             </p:spPr>
+            <p:txBody>
+              <a:bodyPr/>
+              <a:lstStyle/>
+              <a:p>
+                <a:endParaRPr lang="es-ES"/>
+              </a:p>
+            </p:txBody>
           </p:sp>
           <p:sp>
             <p:nvSpPr>
@@ -10693,6 +11219,13 @@
                 </a:ext>
               </a:extLst>
             </p:spPr>
+            <p:txBody>
+              <a:bodyPr/>
+              <a:lstStyle/>
+              <a:p>
+                <a:endParaRPr lang="es-ES"/>
+              </a:p>
+            </p:txBody>
           </p:sp>
           <p:sp>
             <p:nvSpPr>
@@ -10755,6 +11288,13 @@
                 </a:ext>
               </a:extLst>
             </p:spPr>
+            <p:txBody>
+              <a:bodyPr/>
+              <a:lstStyle/>
+              <a:p>
+                <a:endParaRPr lang="es-ES"/>
+              </a:p>
+            </p:txBody>
           </p:sp>
           <p:sp>
             <p:nvSpPr>
@@ -10845,6 +11385,13 @@
                 </a:ext>
               </a:extLst>
             </p:spPr>
+            <p:txBody>
+              <a:bodyPr/>
+              <a:lstStyle/>
+              <a:p>
+                <a:endParaRPr lang="es-ES"/>
+              </a:p>
+            </p:txBody>
           </p:sp>
           <p:sp>
             <p:nvSpPr>
@@ -10935,6 +11482,13 @@
                 </a:ext>
               </a:extLst>
             </p:spPr>
+            <p:txBody>
+              <a:bodyPr/>
+              <a:lstStyle/>
+              <a:p>
+                <a:endParaRPr lang="es-ES"/>
+              </a:p>
+            </p:txBody>
           </p:sp>
           <p:sp>
             <p:nvSpPr>
@@ -11000,6 +11554,13 @@
                 </a:ext>
               </a:extLst>
             </p:spPr>
+            <p:txBody>
+              <a:bodyPr/>
+              <a:lstStyle/>
+              <a:p>
+                <a:endParaRPr lang="es-ES"/>
+              </a:p>
+            </p:txBody>
           </p:sp>
           <p:sp>
             <p:nvSpPr>
@@ -11120,6 +11681,13 @@
                 </a:ext>
               </a:extLst>
             </p:spPr>
+            <p:txBody>
+              <a:bodyPr/>
+              <a:lstStyle/>
+              <a:p>
+                <a:endParaRPr lang="es-ES"/>
+              </a:p>
+            </p:txBody>
           </p:sp>
         </p:grpSp>
         <p:grpSp>
@@ -11201,6 +11769,13 @@
                 </a:ext>
               </a:extLst>
             </p:spPr>
+            <p:txBody>
+              <a:bodyPr/>
+              <a:lstStyle/>
+              <a:p>
+                <a:endParaRPr lang="es-ES"/>
+              </a:p>
+            </p:txBody>
           </p:sp>
           <p:sp>
             <p:nvSpPr>
@@ -11316,6 +11891,13 @@
                 </a:ext>
               </a:extLst>
             </p:spPr>
+            <p:txBody>
+              <a:bodyPr/>
+              <a:lstStyle/>
+              <a:p>
+                <a:endParaRPr lang="es-ES"/>
+              </a:p>
+            </p:txBody>
           </p:sp>
           <p:sp>
             <p:nvSpPr>
@@ -11406,6 +11988,13 @@
                 </a:ext>
               </a:extLst>
             </p:spPr>
+            <p:txBody>
+              <a:bodyPr/>
+              <a:lstStyle/>
+              <a:p>
+                <a:endParaRPr lang="es-ES"/>
+              </a:p>
+            </p:txBody>
           </p:sp>
           <p:sp>
             <p:nvSpPr>
@@ -11471,6 +12060,13 @@
                 </a:ext>
               </a:extLst>
             </p:spPr>
+            <p:txBody>
+              <a:bodyPr/>
+              <a:lstStyle/>
+              <a:p>
+                <a:endParaRPr lang="es-ES"/>
+              </a:p>
+            </p:txBody>
           </p:sp>
           <p:sp>
             <p:nvSpPr>
@@ -11561,6 +12157,13 @@
                 </a:ext>
               </a:extLst>
             </p:spPr>
+            <p:txBody>
+              <a:bodyPr/>
+              <a:lstStyle/>
+              <a:p>
+                <a:endParaRPr lang="es-ES"/>
+              </a:p>
+            </p:txBody>
           </p:sp>
           <p:sp>
             <p:nvSpPr>
@@ -11629,6 +12232,13 @@
                 </a:ext>
               </a:extLst>
             </p:spPr>
+            <p:txBody>
+              <a:bodyPr/>
+              <a:lstStyle/>
+              <a:p>
+                <a:endParaRPr lang="es-ES"/>
+              </a:p>
+            </p:txBody>
           </p:sp>
           <p:sp>
             <p:nvSpPr>
@@ -11719,6 +12329,13 @@
                 </a:ext>
               </a:extLst>
             </p:spPr>
+            <p:txBody>
+              <a:bodyPr/>
+              <a:lstStyle/>
+              <a:p>
+                <a:endParaRPr lang="es-ES"/>
+              </a:p>
+            </p:txBody>
           </p:sp>
           <p:sp>
             <p:nvSpPr>
@@ -11787,6 +12404,13 @@
                 </a:ext>
               </a:extLst>
             </p:spPr>
+            <p:txBody>
+              <a:bodyPr/>
+              <a:lstStyle/>
+              <a:p>
+                <a:endParaRPr lang="es-ES"/>
+              </a:p>
+            </p:txBody>
           </p:sp>
           <p:sp>
             <p:nvSpPr>
@@ -11877,6 +12501,13 @@
                 </a:ext>
               </a:extLst>
             </p:spPr>
+            <p:txBody>
+              <a:bodyPr/>
+              <a:lstStyle/>
+              <a:p>
+                <a:endParaRPr lang="es-ES"/>
+              </a:p>
+            </p:txBody>
           </p:sp>
           <p:sp>
             <p:nvSpPr>
@@ -11911,6 +12542,13 @@
                 </a:ext>
               </a:extLst>
             </p:spPr>
+            <p:txBody>
+              <a:bodyPr/>
+              <a:lstStyle/>
+              <a:p>
+                <a:endParaRPr lang="es-ES"/>
+              </a:p>
+            </p:txBody>
           </p:sp>
         </p:grpSp>
       </p:grpSp>
@@ -12040,7 +12678,7 @@
           <a:p>
             <a:fld id="{DCA36215-1DEB-4529-8A0C-05ACEF313B8E}" type="datetimeFigureOut">
               <a:rPr lang="es-ES" smtClean="0"/>
-              <a:t>12/05/2026</a:t>
+              <a:t>13/05/2026</a:t>
             </a:fld>
             <a:endParaRPr lang="es-ES"/>
           </a:p>
@@ -12578,146 +13216,6 @@
           <p:cNvPr id="2" name="Título 1">
             <a:extLst>
               <a:ext uri="{FF2B5EF4-FFF2-40B4-BE49-F238E27FC236}">
-                <a16:creationId xmlns:a16="http://schemas.microsoft.com/office/drawing/2014/main" id="{6459336D-6942-ABA0-973A-E880491FF9FC}"/>
-              </a:ext>
-            </a:extLst>
-          </p:cNvPr>
-          <p:cNvSpPr>
-            <a:spLocks noGrp="1"/>
-          </p:cNvSpPr>
-          <p:nvPr>
-            <p:ph type="title"/>
-          </p:nvPr>
-        </p:nvSpPr>
-        <p:spPr/>
-        <p:txBody>
-          <a:bodyPr/>
-          <a:lstStyle/>
-          <a:p>
-            <a:endParaRPr lang="es-ES"/>
-          </a:p>
-        </p:txBody>
-      </p:sp>
-      <p:sp>
-        <p:nvSpPr>
-          <p:cNvPr id="3" name="Marcador de contenido 2">
-            <a:extLst>
-              <a:ext uri="{FF2B5EF4-FFF2-40B4-BE49-F238E27FC236}">
-                <a16:creationId xmlns:a16="http://schemas.microsoft.com/office/drawing/2014/main" id="{E8686A20-BE37-6D42-7168-DAF0FC6F98AE}"/>
-              </a:ext>
-            </a:extLst>
-          </p:cNvPr>
-          <p:cNvSpPr>
-            <a:spLocks noGrp="1"/>
-          </p:cNvSpPr>
-          <p:nvPr>
-            <p:ph idx="1"/>
-          </p:nvPr>
-        </p:nvSpPr>
-        <p:spPr/>
-        <p:txBody>
-          <a:bodyPr/>
-          <a:lstStyle/>
-          <a:p>
-            <a:endParaRPr lang="es-ES"/>
-          </a:p>
-        </p:txBody>
-      </p:sp>
-      <p:pic>
-        <p:nvPicPr>
-          <p:cNvPr id="5" name="Imagen 4">
-            <a:extLst>
-              <a:ext uri="{FF2B5EF4-FFF2-40B4-BE49-F238E27FC236}">
-                <a16:creationId xmlns:a16="http://schemas.microsoft.com/office/drawing/2014/main" id="{21AF2F3F-DD5E-14B7-13DD-FACA18B06CE3}"/>
-              </a:ext>
-            </a:extLst>
-          </p:cNvPr>
-          <p:cNvPicPr>
-            <a:picLocks noChangeAspect="1"/>
-          </p:cNvPicPr>
-          <p:nvPr/>
-        </p:nvPicPr>
-        <p:blipFill>
-          <a:blip r:embed="rId2"/>
-          <a:stretch>
-            <a:fillRect/>
-          </a:stretch>
-        </p:blipFill>
-        <p:spPr>
-          <a:xfrm>
-            <a:off x="1201673" y="2128656"/>
-            <a:ext cx="3734321" cy="2600688"/>
-          </a:xfrm>
-          <a:prstGeom prst="rect">
-            <a:avLst/>
-          </a:prstGeom>
-        </p:spPr>
-      </p:pic>
-      <p:pic>
-        <p:nvPicPr>
-          <p:cNvPr id="7" name="Imagen 6">
-            <a:extLst>
-              <a:ext uri="{FF2B5EF4-FFF2-40B4-BE49-F238E27FC236}">
-                <a16:creationId xmlns:a16="http://schemas.microsoft.com/office/drawing/2014/main" id="{0EF2FD4B-B83A-5C65-301B-E7181840D4A9}"/>
-              </a:ext>
-            </a:extLst>
-          </p:cNvPr>
-          <p:cNvPicPr>
-            <a:picLocks noChangeAspect="1"/>
-          </p:cNvPicPr>
-          <p:nvPr/>
-        </p:nvPicPr>
-        <p:blipFill>
-          <a:blip r:embed="rId3"/>
-          <a:stretch>
-            <a:fillRect/>
-          </a:stretch>
-        </p:blipFill>
-        <p:spPr>
-          <a:xfrm>
-            <a:off x="6009911" y="793555"/>
-            <a:ext cx="4980416" cy="5270890"/>
-          </a:xfrm>
-          <a:prstGeom prst="rect">
-            <a:avLst/>
-          </a:prstGeom>
-        </p:spPr>
-      </p:pic>
-    </p:spTree>
-    <p:extLst>
-      <p:ext uri="{BB962C8B-B14F-4D97-AF65-F5344CB8AC3E}">
-        <p14:creationId xmlns:p14="http://schemas.microsoft.com/office/powerpoint/2010/main" val="553032689"/>
-      </p:ext>
-    </p:extLst>
-  </p:cSld>
-  <p:clrMapOvr>
-    <a:masterClrMapping/>
-  </p:clrMapOvr>
-</p:sld>
-</file>
-
-<file path=ppt/slides/slide11.xml><?xml version="1.0" encoding="utf-8"?>
-<p:sld xmlns:a="http://schemas.openxmlformats.org/drawingml/2006/main" xmlns:r="http://schemas.openxmlformats.org/officeDocument/2006/relationships" xmlns:p="http://schemas.openxmlformats.org/presentationml/2006/main">
-  <p:cSld>
-    <p:spTree>
-      <p:nvGrpSpPr>
-        <p:cNvPr id="1" name=""/>
-        <p:cNvGrpSpPr/>
-        <p:nvPr/>
-      </p:nvGrpSpPr>
-      <p:grpSpPr>
-        <a:xfrm>
-          <a:off x="0" y="0"/>
-          <a:ext cx="0" cy="0"/>
-          <a:chOff x="0" y="0"/>
-          <a:chExt cx="0" cy="0"/>
-        </a:xfrm>
-      </p:grpSpPr>
-      <p:sp>
-        <p:nvSpPr>
-          <p:cNvPr id="2" name="Título 1">
-            <a:extLst>
-              <a:ext uri="{FF2B5EF4-FFF2-40B4-BE49-F238E27FC236}">
                 <a16:creationId xmlns:a16="http://schemas.microsoft.com/office/drawing/2014/main" id="{F911B583-542D-FC5A-B765-18F787378B09}"/>
               </a:ext>
             </a:extLst>
@@ -12809,7 +13307,7 @@
 </p:sld>
 </file>
 
-<file path=ppt/slides/slide12.xml><?xml version="1.0" encoding="utf-8"?>
+<file path=ppt/slides/slide11.xml><?xml version="1.0" encoding="utf-8"?>
 <p:sld xmlns:a="http://schemas.openxmlformats.org/drawingml/2006/main" xmlns:r="http://schemas.openxmlformats.org/officeDocument/2006/relationships" xmlns:p="http://schemas.openxmlformats.org/presentationml/2006/main">
   <p:cSld>
     <p:spTree>
@@ -13031,90 +13529,6 @@
           <p:cNvPr id="2" name="Título 1">
             <a:extLst>
               <a:ext uri="{FF2B5EF4-FFF2-40B4-BE49-F238E27FC236}">
-                <a16:creationId xmlns:a16="http://schemas.microsoft.com/office/drawing/2014/main" id="{E4CE50D4-08DC-7876-FA1F-0A233B89DF2C}"/>
-              </a:ext>
-            </a:extLst>
-          </p:cNvPr>
-          <p:cNvSpPr>
-            <a:spLocks noGrp="1"/>
-          </p:cNvSpPr>
-          <p:nvPr>
-            <p:ph type="title"/>
-          </p:nvPr>
-        </p:nvSpPr>
-        <p:spPr/>
-        <p:txBody>
-          <a:bodyPr/>
-          <a:lstStyle/>
-          <a:p>
-            <a:r>
-              <a:rPr lang="es-ES" dirty="0" err="1"/>
-              <a:t>introd</a:t>
-            </a:r>
-            <a:endParaRPr lang="es-ES" dirty="0"/>
-          </a:p>
-        </p:txBody>
-      </p:sp>
-      <p:sp>
-        <p:nvSpPr>
-          <p:cNvPr id="3" name="Marcador de contenido 2">
-            <a:extLst>
-              <a:ext uri="{FF2B5EF4-FFF2-40B4-BE49-F238E27FC236}">
-                <a16:creationId xmlns:a16="http://schemas.microsoft.com/office/drawing/2014/main" id="{5AD68BE1-1318-E54B-DC2B-FCAB677FD2B5}"/>
-              </a:ext>
-            </a:extLst>
-          </p:cNvPr>
-          <p:cNvSpPr>
-            <a:spLocks noGrp="1"/>
-          </p:cNvSpPr>
-          <p:nvPr>
-            <p:ph idx="1"/>
-          </p:nvPr>
-        </p:nvSpPr>
-        <p:spPr/>
-        <p:txBody>
-          <a:bodyPr/>
-          <a:lstStyle/>
-          <a:p>
-            <a:endParaRPr lang="es-ES"/>
-          </a:p>
-        </p:txBody>
-      </p:sp>
-    </p:spTree>
-    <p:extLst>
-      <p:ext uri="{BB962C8B-B14F-4D97-AF65-F5344CB8AC3E}">
-        <p14:creationId xmlns:p14="http://schemas.microsoft.com/office/powerpoint/2010/main" val="2615345713"/>
-      </p:ext>
-    </p:extLst>
-  </p:cSld>
-  <p:clrMapOvr>
-    <a:masterClrMapping/>
-  </p:clrMapOvr>
-</p:sld>
-</file>
-
-<file path=ppt/slides/slide3.xml><?xml version="1.0" encoding="utf-8"?>
-<p:sld xmlns:a="http://schemas.openxmlformats.org/drawingml/2006/main" xmlns:r="http://schemas.openxmlformats.org/officeDocument/2006/relationships" xmlns:p="http://schemas.openxmlformats.org/presentationml/2006/main">
-  <p:cSld>
-    <p:spTree>
-      <p:nvGrpSpPr>
-        <p:cNvPr id="1" name=""/>
-        <p:cNvGrpSpPr/>
-        <p:nvPr/>
-      </p:nvGrpSpPr>
-      <p:grpSpPr>
-        <a:xfrm>
-          <a:off x="0" y="0"/>
-          <a:ext cx="0" cy="0"/>
-          <a:chOff x="0" y="0"/>
-          <a:chExt cx="0" cy="0"/>
-        </a:xfrm>
-      </p:grpSpPr>
-      <p:sp>
-        <p:nvSpPr>
-          <p:cNvPr id="2" name="Título 1">
-            <a:extLst>
-              <a:ext uri="{FF2B5EF4-FFF2-40B4-BE49-F238E27FC236}">
                 <a16:creationId xmlns:a16="http://schemas.microsoft.com/office/drawing/2014/main" id="{3574DFB0-F375-244D-AD5D-D27FDC1396D8}"/>
               </a:ext>
             </a:extLst>
@@ -13221,7 +13635,7 @@
 </p:sld>
 </file>
 
-<file path=ppt/slides/slide4.xml><?xml version="1.0" encoding="utf-8"?>
+<file path=ppt/slides/slide3.xml><?xml version="1.0" encoding="utf-8"?>
 <p:sld xmlns:a="http://schemas.openxmlformats.org/drawingml/2006/main" xmlns:r="http://schemas.openxmlformats.org/officeDocument/2006/relationships" xmlns:p="http://schemas.openxmlformats.org/presentationml/2006/main">
   <p:cSld>
     <p:spTree>
@@ -13326,7 +13740,7 @@
 </p:sld>
 </file>
 
-<file path=ppt/slides/slide5.xml><?xml version="1.0" encoding="utf-8"?>
+<file path=ppt/slides/slide4.xml><?xml version="1.0" encoding="utf-8"?>
 <p:sld xmlns:a="http://schemas.openxmlformats.org/drawingml/2006/main" xmlns:r="http://schemas.openxmlformats.org/officeDocument/2006/relationships" xmlns:p="http://schemas.openxmlformats.org/presentationml/2006/main">
   <p:cSld>
     <p:spTree>
@@ -13416,7 +13830,7 @@
 </p:sld>
 </file>
 
-<file path=ppt/slides/slide6.xml><?xml version="1.0" encoding="utf-8"?>
+<file path=ppt/slides/slide5.xml><?xml version="1.0" encoding="utf-8"?>
 <p:sld xmlns:a="http://schemas.openxmlformats.org/drawingml/2006/main" xmlns:r="http://schemas.openxmlformats.org/officeDocument/2006/relationships" xmlns:p="http://schemas.openxmlformats.org/presentationml/2006/main">
   <p:cSld>
     <p:spTree>
@@ -13593,7 +14007,7 @@
 </p:sld>
 </file>
 
-<file path=ppt/slides/slide7.xml><?xml version="1.0" encoding="utf-8"?>
+<file path=ppt/slides/slide6.xml><?xml version="1.0" encoding="utf-8"?>
 <p:sld xmlns:a="http://schemas.openxmlformats.org/drawingml/2006/main" xmlns:r="http://schemas.openxmlformats.org/officeDocument/2006/relationships" xmlns:p="http://schemas.openxmlformats.org/presentationml/2006/main">
   <p:cSld>
     <p:spTree>
@@ -13706,7 +14120,7 @@
 </p:sld>
 </file>
 
-<file path=ppt/slides/slide8.xml><?xml version="1.0" encoding="utf-8"?>
+<file path=ppt/slides/slide7.xml><?xml version="1.0" encoding="utf-8"?>
 <p:sld xmlns:a="http://schemas.openxmlformats.org/drawingml/2006/main" xmlns:r="http://schemas.openxmlformats.org/officeDocument/2006/relationships" xmlns:p="http://schemas.openxmlformats.org/presentationml/2006/main">
   <p:cSld>
     <p:spTree>
@@ -13943,7 +14357,7 @@
 </p:sld>
 </file>
 
-<file path=ppt/slides/slide9.xml><?xml version="1.0" encoding="utf-8"?>
+<file path=ppt/slides/slide8.xml><?xml version="1.0" encoding="utf-8"?>
 <p:sld xmlns:a="http://schemas.openxmlformats.org/drawingml/2006/main" xmlns:r="http://schemas.openxmlformats.org/officeDocument/2006/relationships" xmlns:p="http://schemas.openxmlformats.org/presentationml/2006/main">
   <p:cSld>
     <p:spTree>
@@ -14047,6 +14461,146 @@
     <p:extLst>
       <p:ext uri="{BB962C8B-B14F-4D97-AF65-F5344CB8AC3E}">
         <p14:creationId xmlns:p14="http://schemas.microsoft.com/office/powerpoint/2010/main" val="732252613"/>
+      </p:ext>
+    </p:extLst>
+  </p:cSld>
+  <p:clrMapOvr>
+    <a:masterClrMapping/>
+  </p:clrMapOvr>
+</p:sld>
+</file>
+
+<file path=ppt/slides/slide9.xml><?xml version="1.0" encoding="utf-8"?>
+<p:sld xmlns:a="http://schemas.openxmlformats.org/drawingml/2006/main" xmlns:r="http://schemas.openxmlformats.org/officeDocument/2006/relationships" xmlns:p="http://schemas.openxmlformats.org/presentationml/2006/main">
+  <p:cSld>
+    <p:spTree>
+      <p:nvGrpSpPr>
+        <p:cNvPr id="1" name=""/>
+        <p:cNvGrpSpPr/>
+        <p:nvPr/>
+      </p:nvGrpSpPr>
+      <p:grpSpPr>
+        <a:xfrm>
+          <a:off x="0" y="0"/>
+          <a:ext cx="0" cy="0"/>
+          <a:chOff x="0" y="0"/>
+          <a:chExt cx="0" cy="0"/>
+        </a:xfrm>
+      </p:grpSpPr>
+      <p:sp>
+        <p:nvSpPr>
+          <p:cNvPr id="2" name="Título 1">
+            <a:extLst>
+              <a:ext uri="{FF2B5EF4-FFF2-40B4-BE49-F238E27FC236}">
+                <a16:creationId xmlns:a16="http://schemas.microsoft.com/office/drawing/2014/main" id="{6459336D-6942-ABA0-973A-E880491FF9FC}"/>
+              </a:ext>
+            </a:extLst>
+          </p:cNvPr>
+          <p:cNvSpPr>
+            <a:spLocks noGrp="1"/>
+          </p:cNvSpPr>
+          <p:nvPr>
+            <p:ph type="title"/>
+          </p:nvPr>
+        </p:nvSpPr>
+        <p:spPr/>
+        <p:txBody>
+          <a:bodyPr/>
+          <a:lstStyle/>
+          <a:p>
+            <a:endParaRPr lang="es-ES"/>
+          </a:p>
+        </p:txBody>
+      </p:sp>
+      <p:sp>
+        <p:nvSpPr>
+          <p:cNvPr id="3" name="Marcador de contenido 2">
+            <a:extLst>
+              <a:ext uri="{FF2B5EF4-FFF2-40B4-BE49-F238E27FC236}">
+                <a16:creationId xmlns:a16="http://schemas.microsoft.com/office/drawing/2014/main" id="{E8686A20-BE37-6D42-7168-DAF0FC6F98AE}"/>
+              </a:ext>
+            </a:extLst>
+          </p:cNvPr>
+          <p:cNvSpPr>
+            <a:spLocks noGrp="1"/>
+          </p:cNvSpPr>
+          <p:nvPr>
+            <p:ph idx="1"/>
+          </p:nvPr>
+        </p:nvSpPr>
+        <p:spPr/>
+        <p:txBody>
+          <a:bodyPr/>
+          <a:lstStyle/>
+          <a:p>
+            <a:endParaRPr lang="es-ES"/>
+          </a:p>
+        </p:txBody>
+      </p:sp>
+      <p:pic>
+        <p:nvPicPr>
+          <p:cNvPr id="5" name="Imagen 4">
+            <a:extLst>
+              <a:ext uri="{FF2B5EF4-FFF2-40B4-BE49-F238E27FC236}">
+                <a16:creationId xmlns:a16="http://schemas.microsoft.com/office/drawing/2014/main" id="{21AF2F3F-DD5E-14B7-13DD-FACA18B06CE3}"/>
+              </a:ext>
+            </a:extLst>
+          </p:cNvPr>
+          <p:cNvPicPr>
+            <a:picLocks noChangeAspect="1"/>
+          </p:cNvPicPr>
+          <p:nvPr/>
+        </p:nvPicPr>
+        <p:blipFill>
+          <a:blip r:embed="rId2"/>
+          <a:stretch>
+            <a:fillRect/>
+          </a:stretch>
+        </p:blipFill>
+        <p:spPr>
+          <a:xfrm>
+            <a:off x="1201673" y="2128656"/>
+            <a:ext cx="3734321" cy="2600688"/>
+          </a:xfrm>
+          <a:prstGeom prst="rect">
+            <a:avLst/>
+          </a:prstGeom>
+        </p:spPr>
+      </p:pic>
+      <p:pic>
+        <p:nvPicPr>
+          <p:cNvPr id="7" name="Imagen 6">
+            <a:extLst>
+              <a:ext uri="{FF2B5EF4-FFF2-40B4-BE49-F238E27FC236}">
+                <a16:creationId xmlns:a16="http://schemas.microsoft.com/office/drawing/2014/main" id="{0EF2FD4B-B83A-5C65-301B-E7181840D4A9}"/>
+              </a:ext>
+            </a:extLst>
+          </p:cNvPr>
+          <p:cNvPicPr>
+            <a:picLocks noChangeAspect="1"/>
+          </p:cNvPicPr>
+          <p:nvPr/>
+        </p:nvPicPr>
+        <p:blipFill>
+          <a:blip r:embed="rId3"/>
+          <a:stretch>
+            <a:fillRect/>
+          </a:stretch>
+        </p:blipFill>
+        <p:spPr>
+          <a:xfrm>
+            <a:off x="6009911" y="793555"/>
+            <a:ext cx="4980416" cy="5270890"/>
+          </a:xfrm>
+          <a:prstGeom prst="rect">
+            <a:avLst/>
+          </a:prstGeom>
+        </p:spPr>
+      </p:pic>
+    </p:spTree>
+    <p:extLst>
+      <p:ext uri="{BB962C8B-B14F-4D97-AF65-F5344CB8AC3E}">
+        <p14:creationId xmlns:p14="http://schemas.microsoft.com/office/powerpoint/2010/main" val="553032689"/>
       </p:ext>
     </p:extLst>
   </p:cSld>
